--- a/Causal_Inference_Course/Week15_Capstone_Reproducibility_Communication/Week15_Capstone_Reproducibility_Communication_Lecture.pptx
+++ b/Causal_Inference_Course/Week15_Capstone_Reproducibility_Communication/Week15_Capstone_Reproducibility_Communication_Lecture.pptx
@@ -18424,7 +18424,7 @@
                 </a:solidFill>
                 <a:latin typeface="Calibri"/>
               </a:rPr>
-              <a:t>Fails via: broken randomization, weak/invalid instrument, manipulation at the cutoff, non-parallel trends.</a:t>
+              <a:t>Fails via: weak instrument, cutoff manipulation, non-parallel trends.</a:t>
             </a:r>
           </a:p>
           <a:p>
